--- a/module3/lesson14_STM_dispaly/lesson14.pptx
+++ b/module3/lesson14_STM_dispaly/lesson14.pptx
@@ -12049,7 +12049,7 @@
         <p:spPr>
           <a:xfrm>
             <a:off x="566928" y="2743200"/>
-            <a:ext cx="4352544" cy="2103120"/>
+            <a:ext cx="3508510" cy="2103120"/>
           </a:xfrm>
           <a:prstGeom prst="rect">
             <a:avLst/>
